--- a/classes/parte-4-seguridad-de-aplicaciones-web/100-xml-external-entities-xxe/clase-100-presentacion.pptx
+++ b/classes/parte-4-seguridad-de-aplicaciones-web/100-xml-external-entities-xxe/clase-100-presentacion.pptx
@@ -17,6 +17,9 @@
     <p:sldId id="265" r:id="rId16"/>
     <p:sldId id="266" r:id="rId17"/>
     <p:sldId id="267" r:id="rId18"/>
+    <p:sldId id="268" r:id="rId19"/>
+    <p:sldId id="269" r:id="rId20"/>
+    <p:sldId id="270" r:id="rId21"/>
   </p:sldIdLst>
   <p:sldSz cx="9144000" cy="6858000" type="screen4x3"/>
   <p:notesSz cx="6858000" cy="9144000"/>
@@ -3198,7 +3201,7 @@
                   <a:srgbClr val="0B3D2E"/>
                 </a:solidFill>
               </a:rPr>
-              <a:t>⚠️ Errores comunes</a:t>
+              <a:t>✍️ Ejercicios</a:t>
             </a:r>
           </a:p>
         </p:txBody>
@@ -3236,67 +3239,82 @@
                   <a:srgbClr val="22282E"/>
                 </a:solidFill>
               </a:rPr>
-              <a:t>•  La entidad no se resuelve — Parser con entidades deshabilitadas; busca otro endpoint</a:t>
-            </a:r>
-          </a:p>
-          <a:p>
-            <a:pPr>
-              <a:spcAft>
-                <a:spcPts val="600"/>
-              </a:spcAft>
-            </a:pPr>
-            <a:r>
-              <a:rPr sz="1500">
-                <a:solidFill>
-                  <a:srgbClr val="22282E"/>
-                </a:solidFill>
-              </a:rPr>
-              <a:t>•  Error de sintaxis XML — DTD mal formado; valida la estructura</a:t>
-            </a:r>
-          </a:p>
-          <a:p>
-            <a:pPr>
-              <a:spcAft>
-                <a:spcPts val="600"/>
-              </a:spcAft>
-            </a:pPr>
-            <a:r>
-              <a:rPr sz="1500">
-                <a:solidFill>
-                  <a:srgbClr val="22282E"/>
-                </a:solidFill>
-              </a:rPr>
-              <a:t>•  Sin salida del archivo — XXE ciega; usa DTD externo OOB</a:t>
-            </a:r>
-          </a:p>
-          <a:p>
-            <a:pPr>
-              <a:spcAft>
-                <a:spcPts val="600"/>
-              </a:spcAft>
-            </a:pPr>
-            <a:r>
-              <a:rPr sz="1500">
-                <a:solidFill>
-                  <a:srgbClr val="22282E"/>
-                </a:solidFill>
-              </a:rPr>
-              <a:t>•  DTD externo no se carga — El servidor no permite conexiones salientes</a:t>
-            </a:r>
-          </a:p>
-          <a:p>
-            <a:pPr>
-              <a:spcAft>
-                <a:spcPts val="600"/>
-              </a:spcAft>
-            </a:pPr>
-            <a:r>
-              <a:rPr sz="1500">
-                <a:solidFill>
-                  <a:srgbClr val="22282E"/>
-                </a:solidFill>
-              </a:rPr>
-              <a:t>•  Parameter entity ignorada — Restricciones del parser; ajusta la técnica</a:t>
+              <a:t>•  Lee /etc/hostname y /etc/passwd en el lab y explica la diferencia de impacto.</a:t>
+            </a:r>
+          </a:p>
+          <a:p>
+            <a:pPr>
+              <a:spcAft>
+                <a:spcPts val="600"/>
+              </a:spcAft>
+            </a:pPr>
+            <a:r>
+              <a:rPr sz="1500">
+                <a:solidFill>
+                  <a:srgbClr val="22282E"/>
+                </a:solidFill>
+              </a:rPr>
+              <a:t>•  Transforma un XXE de lectura en un SSRF a metadata.</a:t>
+            </a:r>
+          </a:p>
+          <a:p>
+            <a:pPr>
+              <a:spcAft>
+                <a:spcPts val="600"/>
+              </a:spcAft>
+            </a:pPr>
+            <a:r>
+              <a:rPr sz="1500">
+                <a:solidFill>
+                  <a:srgbClr val="22282E"/>
+                </a:solidFill>
+              </a:rPr>
+              <a:t>•  Construye el DTD externo para una XXE ciega OOB.</a:t>
+            </a:r>
+          </a:p>
+          <a:p>
+            <a:pPr>
+              <a:spcAft>
+                <a:spcPts val="600"/>
+              </a:spcAft>
+            </a:pPr>
+            <a:r>
+              <a:rPr sz="1500">
+                <a:solidFill>
+                  <a:srgbClr val="22282E"/>
+                </a:solidFill>
+              </a:rPr>
+              <a:t>•  Investiga cómo un SVG subido puede desencadenar XXE.</a:t>
+            </a:r>
+          </a:p>
+          <a:p>
+            <a:pPr>
+              <a:spcAft>
+                <a:spcPts val="600"/>
+              </a:spcAft>
+            </a:pPr>
+            <a:r>
+              <a:rPr sz="1500">
+                <a:solidFill>
+                  <a:srgbClr val="22282E"/>
+                </a:solidFill>
+              </a:rPr>
+              <a:t>•  Escribe la configuración segura de un parser en Java/Python que deshabilite DTD.</a:t>
+            </a:r>
+          </a:p>
+          <a:p>
+            <a:pPr>
+              <a:spcAft>
+                <a:spcPts val="600"/>
+              </a:spcAft>
+            </a:pPr>
+            <a:r>
+              <a:rPr sz="1500">
+                <a:solidFill>
+                  <a:srgbClr val="22282E"/>
+                </a:solidFill>
+              </a:rPr>
+              <a:t>•  Explica por qué SAML es históricamente vulnerable a XXE.</a:t>
             </a:r>
           </a:p>
         </p:txBody>
@@ -3347,7 +3365,7 @@
                   <a:srgbClr val="0B3D2E"/>
                 </a:solidFill>
               </a:rPr>
-              <a:t>❓ Preguntas frecuentes</a:t>
+              <a:t>📝 Reto verificable</a:t>
             </a:r>
           </a:p>
         </p:txBody>
@@ -3385,82 +3403,22 @@
                   <a:srgbClr val="22282E"/>
                 </a:solidFill>
               </a:rPr>
-              <a:t>•  ❓ ¿Por qué sigue existiendo XXE si es antiguo?</a:t>
-            </a:r>
-          </a:p>
-          <a:p>
-            <a:pPr>
-              <a:spcAft>
-                <a:spcPts val="600"/>
-              </a:spcAft>
-            </a:pPr>
-            <a:r>
-              <a:rPr sz="1500">
-                <a:solidFill>
-                  <a:srgbClr val="22282E"/>
-                </a:solidFill>
-              </a:rPr>
-              <a:t>•  Porque muchos parsers procesan DTD por defecto y XML se esconde en SAML, SVG, DOCX y APIs SOAP.</a:t>
-            </a:r>
-          </a:p>
-          <a:p>
-            <a:pPr>
-              <a:spcAft>
-                <a:spcPts val="600"/>
-              </a:spcAft>
-            </a:pPr>
-            <a:r>
-              <a:rPr sz="1500">
-                <a:solidFill>
-                  <a:srgbClr val="22282E"/>
-                </a:solidFill>
-              </a:rPr>
-              <a:t>•  ❓ ¿JSON es inmune?</a:t>
-            </a:r>
-          </a:p>
-          <a:p>
-            <a:pPr>
-              <a:spcAft>
-                <a:spcPts val="600"/>
-              </a:spcAft>
-            </a:pPr>
-            <a:r>
-              <a:rPr sz="1500">
-                <a:solidFill>
-                  <a:srgbClr val="22282E"/>
-                </a:solidFill>
-              </a:rPr>
-              <a:t>•  JSON no tiene entidades externas, así que no sufre XXE. Pero otras inyecciones sí aplican.</a:t>
-            </a:r>
-          </a:p>
-          <a:p>
-            <a:pPr>
-              <a:spcAft>
-                <a:spcPts val="600"/>
-              </a:spcAft>
-            </a:pPr>
-            <a:r>
-              <a:rPr sz="1500">
-                <a:solidFill>
-                  <a:srgbClr val="22282E"/>
-                </a:solidFill>
-              </a:rPr>
-              <a:t>•  ❓ ¿Cuál es la defensa definitiva?</a:t>
-            </a:r>
-          </a:p>
-          <a:p>
-            <a:pPr>
-              <a:spcAft>
-                <a:spcPts val="600"/>
-              </a:spcAft>
-            </a:pPr>
-            <a:r>
-              <a:rPr sz="1500">
-                <a:solidFill>
-                  <a:srgbClr val="22282E"/>
-                </a:solidFill>
-              </a:rPr>
-              <a:t>•  Deshabilitar el procesamiento de DTD y entidades externas en la configuración del parser.</a:t>
+              <a:t>•  Resuelve un lab de XXE ciega de PortSwigger exfiltrando el contenido de un archivo del servidor mediante un DTD externo alojado por ti.</a:t>
+            </a:r>
+          </a:p>
+          <a:p>
+            <a:pPr>
+              <a:spcAft>
+                <a:spcPts val="600"/>
+              </a:spcAft>
+            </a:pPr>
+            <a:r>
+              <a:rPr sz="1500">
+                <a:solidFill>
+                  <a:srgbClr val="22282E"/>
+                </a:solidFill>
+              </a:rPr>
+              <a:t>•  Criterio de aceptación: el lab queda resuelto, entregas el DTD externo, el payload y el dato exfiltrado, y explicas la configuración de parser que lo evitaría.</a:t>
             </a:r>
           </a:p>
         </p:txBody>
@@ -3511,7 +3469,7 @@
                   <a:srgbClr val="0B3D2E"/>
                 </a:solidFill>
               </a:rPr>
-              <a:t>🔗 Referencias</a:t>
+              <a:t>⚠️ Errores comunes</a:t>
             </a:r>
           </a:p>
         </p:txBody>
@@ -3549,6 +3507,319 @@
                   <a:srgbClr val="22282E"/>
                 </a:solidFill>
               </a:rPr>
+              <a:t>•  La entidad no se resuelve — Parser con entidades deshabilitadas; busca otro endpoint</a:t>
+            </a:r>
+          </a:p>
+          <a:p>
+            <a:pPr>
+              <a:spcAft>
+                <a:spcPts val="600"/>
+              </a:spcAft>
+            </a:pPr>
+            <a:r>
+              <a:rPr sz="1500">
+                <a:solidFill>
+                  <a:srgbClr val="22282E"/>
+                </a:solidFill>
+              </a:rPr>
+              <a:t>•  Error de sintaxis XML — DTD mal formado; valida la estructura</a:t>
+            </a:r>
+          </a:p>
+          <a:p>
+            <a:pPr>
+              <a:spcAft>
+                <a:spcPts val="600"/>
+              </a:spcAft>
+            </a:pPr>
+            <a:r>
+              <a:rPr sz="1500">
+                <a:solidFill>
+                  <a:srgbClr val="22282E"/>
+                </a:solidFill>
+              </a:rPr>
+              <a:t>•  Sin salida del archivo — XXE ciega; usa DTD externo OOB</a:t>
+            </a:r>
+          </a:p>
+          <a:p>
+            <a:pPr>
+              <a:spcAft>
+                <a:spcPts val="600"/>
+              </a:spcAft>
+            </a:pPr>
+            <a:r>
+              <a:rPr sz="1500">
+                <a:solidFill>
+                  <a:srgbClr val="22282E"/>
+                </a:solidFill>
+              </a:rPr>
+              <a:t>•  DTD externo no se carga — El servidor no permite conexiones salientes</a:t>
+            </a:r>
+          </a:p>
+          <a:p>
+            <a:pPr>
+              <a:spcAft>
+                <a:spcPts val="600"/>
+              </a:spcAft>
+            </a:pPr>
+            <a:r>
+              <a:rPr sz="1500">
+                <a:solidFill>
+                  <a:srgbClr val="22282E"/>
+                </a:solidFill>
+              </a:rPr>
+              <a:t>•  Parameter entity ignorada — Restricciones del parser; ajusta la técnica</a:t>
+            </a:r>
+          </a:p>
+        </p:txBody>
+      </p:sp>
+    </p:spTree>
+  </p:cSld>
+  <p:clrMapOvr>
+    <a:masterClrMapping/>
+  </p:clrMapOvr>
+</p:sld>
+</file>
+
+<file path=ppt/slides/slide13.xml><?xml version="1.0" encoding="utf-8"?>
+<p:sld xmlns:a="http://schemas.openxmlformats.org/drawingml/2006/main" xmlns:p="http://schemas.openxmlformats.org/presentationml/2006/main" xmlns:r="http://schemas.openxmlformats.org/officeDocument/2006/relationships">
+  <p:cSld>
+    <p:spTree>
+      <p:nvGrpSpPr>
+        <p:cNvPr id="1" name=""/>
+        <p:cNvGrpSpPr/>
+        <p:nvPr/>
+      </p:nvGrpSpPr>
+      <p:grpSpPr/>
+      <p:sp>
+        <p:nvSpPr>
+          <p:cNvPr id="2" name="TextBox 1"/>
+          <p:cNvSpPr txBox="1"/>
+          <p:nvPr/>
+        </p:nvSpPr>
+        <p:spPr>
+          <a:xfrm>
+            <a:off x="457200" y="320040"/>
+            <a:ext cx="8229600" cy="822960"/>
+          </a:xfrm>
+          <a:prstGeom prst="rect">
+            <a:avLst/>
+          </a:prstGeom>
+          <a:noFill/>
+        </p:spPr>
+        <p:txBody>
+          <a:bodyPr wrap="square">
+            <a:spAutoFit/>
+          </a:bodyPr>
+          <a:lstStyle/>
+          <a:p>
+            <a:r>
+              <a:rPr sz="2600" b="1">
+                <a:solidFill>
+                  <a:srgbClr val="0B3D2E"/>
+                </a:solidFill>
+              </a:rPr>
+              <a:t>❓ Preguntas frecuentes</a:t>
+            </a:r>
+          </a:p>
+        </p:txBody>
+      </p:sp>
+      <p:sp>
+        <p:nvSpPr>
+          <p:cNvPr id="3" name="TextBox 2"/>
+          <p:cNvSpPr txBox="1"/>
+          <p:nvPr/>
+        </p:nvSpPr>
+        <p:spPr>
+          <a:xfrm>
+            <a:off x="457200" y="1280160"/>
+            <a:ext cx="8229600" cy="4937760"/>
+          </a:xfrm>
+          <a:prstGeom prst="rect">
+            <a:avLst/>
+          </a:prstGeom>
+          <a:noFill/>
+        </p:spPr>
+        <p:txBody>
+          <a:bodyPr wrap="square">
+            <a:spAutoFit/>
+          </a:bodyPr>
+          <a:lstStyle/>
+          <a:p>
+            <a:pPr>
+              <a:spcAft>
+                <a:spcPts val="600"/>
+              </a:spcAft>
+            </a:pPr>
+            <a:r>
+              <a:rPr sz="1500">
+                <a:solidFill>
+                  <a:srgbClr val="22282E"/>
+                </a:solidFill>
+              </a:rPr>
+              <a:t>•  ❓ ¿Por qué sigue existiendo XXE si es antiguo?</a:t>
+            </a:r>
+          </a:p>
+          <a:p>
+            <a:pPr>
+              <a:spcAft>
+                <a:spcPts val="600"/>
+              </a:spcAft>
+            </a:pPr>
+            <a:r>
+              <a:rPr sz="1500">
+                <a:solidFill>
+                  <a:srgbClr val="22282E"/>
+                </a:solidFill>
+              </a:rPr>
+              <a:t>•  Porque muchos parsers procesan DTD por defecto y XML se esconde en SAML, SVG, DOCX y APIs SOAP.</a:t>
+            </a:r>
+          </a:p>
+          <a:p>
+            <a:pPr>
+              <a:spcAft>
+                <a:spcPts val="600"/>
+              </a:spcAft>
+            </a:pPr>
+            <a:r>
+              <a:rPr sz="1500">
+                <a:solidFill>
+                  <a:srgbClr val="22282E"/>
+                </a:solidFill>
+              </a:rPr>
+              <a:t>•  ❓ ¿JSON es inmune?</a:t>
+            </a:r>
+          </a:p>
+          <a:p>
+            <a:pPr>
+              <a:spcAft>
+                <a:spcPts val="600"/>
+              </a:spcAft>
+            </a:pPr>
+            <a:r>
+              <a:rPr sz="1500">
+                <a:solidFill>
+                  <a:srgbClr val="22282E"/>
+                </a:solidFill>
+              </a:rPr>
+              <a:t>•  JSON no tiene entidades externas, así que no sufre XXE. Pero otras inyecciones sí aplican.</a:t>
+            </a:r>
+          </a:p>
+          <a:p>
+            <a:pPr>
+              <a:spcAft>
+                <a:spcPts val="600"/>
+              </a:spcAft>
+            </a:pPr>
+            <a:r>
+              <a:rPr sz="1500">
+                <a:solidFill>
+                  <a:srgbClr val="22282E"/>
+                </a:solidFill>
+              </a:rPr>
+              <a:t>•  ❓ ¿Cuál es la defensa definitiva?</a:t>
+            </a:r>
+          </a:p>
+          <a:p>
+            <a:pPr>
+              <a:spcAft>
+                <a:spcPts val="600"/>
+              </a:spcAft>
+            </a:pPr>
+            <a:r>
+              <a:rPr sz="1500">
+                <a:solidFill>
+                  <a:srgbClr val="22282E"/>
+                </a:solidFill>
+              </a:rPr>
+              <a:t>•  Deshabilitar el procesamiento de DTD y entidades externas en la configuración del parser.</a:t>
+            </a:r>
+          </a:p>
+        </p:txBody>
+      </p:sp>
+    </p:spTree>
+  </p:cSld>
+  <p:clrMapOvr>
+    <a:masterClrMapping/>
+  </p:clrMapOvr>
+</p:sld>
+</file>
+
+<file path=ppt/slides/slide14.xml><?xml version="1.0" encoding="utf-8"?>
+<p:sld xmlns:a="http://schemas.openxmlformats.org/drawingml/2006/main" xmlns:p="http://schemas.openxmlformats.org/presentationml/2006/main" xmlns:r="http://schemas.openxmlformats.org/officeDocument/2006/relationships">
+  <p:cSld>
+    <p:spTree>
+      <p:nvGrpSpPr>
+        <p:cNvPr id="1" name=""/>
+        <p:cNvGrpSpPr/>
+        <p:nvPr/>
+      </p:nvGrpSpPr>
+      <p:grpSpPr/>
+      <p:sp>
+        <p:nvSpPr>
+          <p:cNvPr id="2" name="TextBox 1"/>
+          <p:cNvSpPr txBox="1"/>
+          <p:nvPr/>
+        </p:nvSpPr>
+        <p:spPr>
+          <a:xfrm>
+            <a:off x="457200" y="320040"/>
+            <a:ext cx="8229600" cy="822960"/>
+          </a:xfrm>
+          <a:prstGeom prst="rect">
+            <a:avLst/>
+          </a:prstGeom>
+          <a:noFill/>
+        </p:spPr>
+        <p:txBody>
+          <a:bodyPr wrap="square">
+            <a:spAutoFit/>
+          </a:bodyPr>
+          <a:lstStyle/>
+          <a:p>
+            <a:r>
+              <a:rPr sz="2600" b="1">
+                <a:solidFill>
+                  <a:srgbClr val="0B3D2E"/>
+                </a:solidFill>
+              </a:rPr>
+              <a:t>🔗 Referencias</a:t>
+            </a:r>
+          </a:p>
+        </p:txBody>
+      </p:sp>
+      <p:sp>
+        <p:nvSpPr>
+          <p:cNvPr id="3" name="TextBox 2"/>
+          <p:cNvSpPr txBox="1"/>
+          <p:nvPr/>
+        </p:nvSpPr>
+        <p:spPr>
+          <a:xfrm>
+            <a:off x="457200" y="1280160"/>
+            <a:ext cx="8229600" cy="4937760"/>
+          </a:xfrm>
+          <a:prstGeom prst="rect">
+            <a:avLst/>
+          </a:prstGeom>
+          <a:noFill/>
+        </p:spPr>
+        <p:txBody>
+          <a:bodyPr wrap="square">
+            <a:spAutoFit/>
+          </a:bodyPr>
+          <a:lstStyle/>
+          <a:p>
+            <a:pPr>
+              <a:spcAft>
+                <a:spcPts val="600"/>
+              </a:spcAft>
+            </a:pPr>
+            <a:r>
+              <a:rPr sz="1500">
+                <a:solidFill>
+                  <a:srgbClr val="22282E"/>
+                </a:solidFill>
+              </a:rPr>
               <a:t>•  Stuttard &amp; Pinto, The Web Application Hacker's Handbook, cap. 9.</a:t>
             </a:r>
           </a:p>
@@ -3599,6 +3870,81 @@
           </a:p>
         </p:txBody>
       </p:sp>
+    </p:spTree>
+  </p:cSld>
+  <p:clrMapOvr>
+    <a:masterClrMapping/>
+  </p:clrMapOvr>
+</p:sld>
+</file>
+
+<file path=ppt/slides/slide15.xml><?xml version="1.0" encoding="utf-8"?>
+<p:sld xmlns:a="http://schemas.openxmlformats.org/drawingml/2006/main" xmlns:p="http://schemas.openxmlformats.org/presentationml/2006/main" xmlns:r="http://schemas.openxmlformats.org/officeDocument/2006/relationships">
+  <p:cSld>
+    <p:spTree>
+      <p:nvGrpSpPr>
+        <p:cNvPr id="1" name=""/>
+        <p:cNvGrpSpPr/>
+        <p:nvPr/>
+      </p:nvGrpSpPr>
+      <p:grpSpPr/>
+      <p:sp>
+        <p:nvSpPr>
+          <p:cNvPr id="2" name="TextBox 1"/>
+          <p:cNvSpPr txBox="1"/>
+          <p:nvPr/>
+        </p:nvSpPr>
+        <p:spPr>
+          <a:xfrm>
+            <a:off x="457200" y="274320"/>
+            <a:ext cx="8229600" cy="640080"/>
+          </a:xfrm>
+          <a:prstGeom prst="rect">
+            <a:avLst/>
+          </a:prstGeom>
+          <a:noFill/>
+        </p:spPr>
+        <p:txBody>
+          <a:bodyPr wrap="square">
+            <a:spAutoFit/>
+          </a:bodyPr>
+          <a:lstStyle/>
+          <a:p>
+            <a:r>
+              <a:rPr sz="2200" b="1">
+                <a:solidFill>
+                  <a:srgbClr val="0B3D2E"/>
+                </a:solidFill>
+              </a:rPr>
+              <a:t>Diagrama de la clase</a:t>
+            </a:r>
+          </a:p>
+        </p:txBody>
+      </p:sp>
+      <p:pic>
+        <p:nvPicPr>
+          <p:cNvPr id="3" name="Picture 2" descr="e45a00aaadf1ca15.png"/>
+          <p:cNvPicPr>
+            <a:picLocks noChangeAspect="1"/>
+          </p:cNvPicPr>
+          <p:nvPr/>
+        </p:nvPicPr>
+        <p:blipFill>
+          <a:blip r:embed="rId2"/>
+          <a:stretch>
+            <a:fillRect/>
+          </a:stretch>
+        </p:blipFill>
+        <p:spPr>
+          <a:xfrm>
+            <a:off x="1343605" y="1097280"/>
+            <a:ext cx="6456789" cy="5303520"/>
+          </a:xfrm>
+          <a:prstGeom prst="rect">
+            <a:avLst/>
+          </a:prstGeom>
+        </p:spPr>
+      </p:pic>
     </p:spTree>
   </p:cSld>
   <p:clrMapOvr>
@@ -3683,7 +4029,7 @@
                   <a:srgbClr val="22282E"/>
                 </a:solidFill>
               </a:rPr>
-              <a:t>•  Explotar vulnerabilidades XXE (XML External Entities): abusar de parsers XML mal configurados para leer archivos locales, provocar SSRF y, en casos ciegos, exfiltrar datos out-of-band. Es un fallo clásico que sigue apareciendo en importadores, SOAP, SAML y formatos basados en XML.</a:t>
+              <a:t>•  Explotar vulnerabilidades XXE (XML External Entities): abusar de parsers XML mal configurados para leer archivos locales, provocar SSRF y, en casos ciegos, exfiltrar datos out-of-band. Es un fallo…</a:t>
             </a:r>
           </a:p>
         </p:txBody>
@@ -4077,7 +4423,7 @@
                   <a:srgbClr val="0B3D2E"/>
                 </a:solidFill>
               </a:rPr>
-              <a:t>📖 Definiciones y características</a:t>
+              <a:t>🧠 Explicación en profundidad</a:t>
             </a:r>
           </a:p>
         </p:txBody>
@@ -4115,82 +4461,97 @@
                   <a:srgbClr val="22282E"/>
                 </a:solidFill>
               </a:rPr>
-              <a:t>•  XXE: abuso de entidades externas en un parser XML. Característica: permite leer archivos y hacer SSRF.</a:t>
-            </a:r>
-          </a:p>
-          <a:p>
-            <a:pPr>
-              <a:spcAft>
-                <a:spcPts val="600"/>
-              </a:spcAft>
-            </a:pPr>
-            <a:r>
-              <a:rPr sz="1500">
-                <a:solidFill>
-                  <a:srgbClr val="22282E"/>
-                </a:solidFill>
-              </a:rPr>
-              <a:t>•  DTD (Document Type Definition): define estructura y entidades del XML. Característica: donde se declaran las entidades externas.</a:t>
-            </a:r>
-          </a:p>
-          <a:p>
-            <a:pPr>
-              <a:spcAft>
-                <a:spcPts val="600"/>
-              </a:spcAft>
-            </a:pPr>
-            <a:r>
-              <a:rPr sz="1500">
-                <a:solidFill>
-                  <a:srgbClr val="22282E"/>
-                </a:solidFill>
-              </a:rPr>
-              <a:t>•  Entidad externa: referencia a un recurso externo (SYSTEM "file:///etc/passwd"). Característica: el parser la resuelve si no está deshabilitada.</a:t>
-            </a:r>
-          </a:p>
-          <a:p>
-            <a:pPr>
-              <a:spcAft>
-                <a:spcPts val="600"/>
-              </a:spcAft>
-            </a:pPr>
-            <a:r>
-              <a:rPr sz="1500">
-                <a:solidFill>
-                  <a:srgbClr val="22282E"/>
-                </a:solidFill>
-              </a:rPr>
-              <a:t>•  XXE ciega: no hay salida directa; se usa DTD externo para exfiltrar. Característica: requiere servidor del atacante.</a:t>
-            </a:r>
-          </a:p>
-          <a:p>
-            <a:pPr>
-              <a:spcAft>
-                <a:spcPts val="600"/>
-              </a:spcAft>
-            </a:pPr>
-            <a:r>
-              <a:rPr sz="1500">
-                <a:solidFill>
-                  <a:srgbClr val="22282E"/>
-                </a:solidFill>
-              </a:rPr>
-              <a:t>•  Parameter entity (%): entidad usada dentro del DTD. Característica: clave para exfiltración OOB.</a:t>
-            </a:r>
-          </a:p>
-          <a:p>
-            <a:pPr>
-              <a:spcAft>
-                <a:spcPts val="600"/>
-              </a:spcAft>
-            </a:pPr>
-            <a:r>
-              <a:rPr sz="1500">
-                <a:solidFill>
-                  <a:srgbClr val="22282E"/>
-                </a:solidFill>
-              </a:rPr>
-              <a:t>•  Deshabilitar DTD: configurar el parser para no procesar entidades. Característica: defensa definitiva.</a:t>
+              <a:t>•  El XML External Entity abusa de una funcionalidad legítima del formato XML: las entidades,</a:t>
+            </a:r>
+          </a:p>
+          <a:p>
+            <a:pPr>
+              <a:spcAft>
+                <a:spcPts val="600"/>
+              </a:spcAft>
+            </a:pPr>
+            <a:r>
+              <a:rPr sz="1500">
+                <a:solidFill>
+                  <a:srgbClr val="22282E"/>
+                </a:solidFill>
+              </a:rPr>
+              <a:t>•  que son como variables que se definen en la cabecera del documento (la DTD) y se expanden en el</a:t>
+            </a:r>
+          </a:p>
+          <a:p>
+            <a:pPr>
+              <a:spcAft>
+                <a:spcPts val="600"/>
+              </a:spcAft>
+            </a:pPr>
+            <a:r>
+              <a:rPr sz="1500">
+                <a:solidFill>
+                  <a:srgbClr val="22282E"/>
+                </a:solidFill>
+              </a:rPr>
+              <a:t>•  cuerpo. XML permite además que una entidad apunte a un recurso externo —un fichero, una URL—, y</a:t>
+            </a:r>
+          </a:p>
+          <a:p>
+            <a:pPr>
+              <a:spcAft>
+                <a:spcPts val="600"/>
+              </a:spcAft>
+            </a:pPr>
+            <a:r>
+              <a:rPr sz="1500">
+                <a:solidFill>
+                  <a:srgbClr val="22282E"/>
+                </a:solidFill>
+              </a:rPr>
+              <a:t>•  ahí está el problema: si un parser XML procesa entidades externas y el atacante controla el XML de</a:t>
+            </a:r>
+          </a:p>
+          <a:p>
+            <a:pPr>
+              <a:spcAft>
+                <a:spcPts val="600"/>
+              </a:spcAft>
+            </a:pPr>
+            <a:r>
+              <a:rPr sz="1500">
+                <a:solidFill>
+                  <a:srgbClr val="22282E"/>
+                </a:solidFill>
+              </a:rPr>
+              <a:t>•  entrada, puede definir una entidad que lea un fichero del servidor o haga una petición de red. La</a:t>
+            </a:r>
+          </a:p>
+          <a:p>
+            <a:pPr>
+              <a:spcAft>
+                <a:spcPts val="600"/>
+              </a:spcAft>
+            </a:pPr>
+            <a:r>
+              <a:rPr sz="1500">
+                <a:solidFill>
+                  <a:srgbClr val="22282E"/>
+                </a:solidFill>
+              </a:rPr>
+              <a:t>•  causa raíz no es un bug, es una característica peligrosa activada por defecto en muchos parsers</a:t>
+            </a:r>
+          </a:p>
+          <a:p>
+            <a:pPr>
+              <a:spcAft>
+                <a:spcPts val="600"/>
+              </a:spcAft>
+            </a:pPr>
+            <a:r>
+              <a:rPr sz="1500">
+                <a:solidFill>
+                  <a:srgbClr val="22282E"/>
+                </a:solidFill>
+              </a:rPr>
+              <a:t>•  antiguos, y por eso la defensa consiste sobre todo en desactivarla.</a:t>
             </a:r>
           </a:p>
         </p:txBody>
@@ -4241,7 +4602,7 @@
                   <a:srgbClr val="0B3D2E"/>
                 </a:solidFill>
               </a:rPr>
-              <a:t>🧰 Herramientas y preparación</a:t>
+              <a:t>📖 Definiciones y características</a:t>
             </a:r>
           </a:p>
         </p:txBody>
@@ -4279,37 +4640,82 @@
                   <a:srgbClr val="22282E"/>
                 </a:solidFill>
               </a:rPr>
-              <a:t>•  PortSwigger labs de XXE y Juice Shop (reto de XXE).</a:t>
-            </a:r>
-          </a:p>
-          <a:p>
-            <a:pPr>
-              <a:spcAft>
-                <a:spcPts val="600"/>
-              </a:spcAft>
-            </a:pPr>
-            <a:r>
-              <a:rPr sz="1500">
-                <a:solidFill>
-                  <a:srgbClr val="22282E"/>
-                </a:solidFill>
-              </a:rPr>
-              <a:t>•  Burp para editar cuerpos XML.</a:t>
-            </a:r>
-          </a:p>
-          <a:p>
-            <a:pPr>
-              <a:spcAft>
-                <a:spcPts val="600"/>
-              </a:spcAft>
-            </a:pPr>
-            <a:r>
-              <a:rPr sz="1500">
-                <a:solidFill>
-                  <a:srgbClr val="22282E"/>
-                </a:solidFill>
-              </a:rPr>
-              <a:t>•  Servidor propio para alojar el DTD externo en XXE ciega.</a:t>
+              <a:t>•  XXE: abuso de entidades externas en un parser XML. Característica: permite leer archivos y hacer SSRF.</a:t>
+            </a:r>
+          </a:p>
+          <a:p>
+            <a:pPr>
+              <a:spcAft>
+                <a:spcPts val="600"/>
+              </a:spcAft>
+            </a:pPr>
+            <a:r>
+              <a:rPr sz="1500">
+                <a:solidFill>
+                  <a:srgbClr val="22282E"/>
+                </a:solidFill>
+              </a:rPr>
+              <a:t>•  DTD (Document Type Definition): define estructura y entidades del XML. Característica: donde se declaran las entidades externas.</a:t>
+            </a:r>
+          </a:p>
+          <a:p>
+            <a:pPr>
+              <a:spcAft>
+                <a:spcPts val="600"/>
+              </a:spcAft>
+            </a:pPr>
+            <a:r>
+              <a:rPr sz="1500">
+                <a:solidFill>
+                  <a:srgbClr val="22282E"/>
+                </a:solidFill>
+              </a:rPr>
+              <a:t>•  Entidad externa: referencia a un recurso externo (SYSTEM "file:///etc/passwd"). Característica: el parser la resuelve si no está deshabilitada.</a:t>
+            </a:r>
+          </a:p>
+          <a:p>
+            <a:pPr>
+              <a:spcAft>
+                <a:spcPts val="600"/>
+              </a:spcAft>
+            </a:pPr>
+            <a:r>
+              <a:rPr sz="1500">
+                <a:solidFill>
+                  <a:srgbClr val="22282E"/>
+                </a:solidFill>
+              </a:rPr>
+              <a:t>•  XXE ciega: no hay salida directa; se usa DTD externo para exfiltrar. Característica: requiere servidor del atacante.</a:t>
+            </a:r>
+          </a:p>
+          <a:p>
+            <a:pPr>
+              <a:spcAft>
+                <a:spcPts val="600"/>
+              </a:spcAft>
+            </a:pPr>
+            <a:r>
+              <a:rPr sz="1500">
+                <a:solidFill>
+                  <a:srgbClr val="22282E"/>
+                </a:solidFill>
+              </a:rPr>
+              <a:t>•  Parameter entity (%): entidad usada dentro del DTD. Característica: clave para exfiltración OOB.</a:t>
+            </a:r>
+          </a:p>
+          <a:p>
+            <a:pPr>
+              <a:spcAft>
+                <a:spcPts val="600"/>
+              </a:spcAft>
+            </a:pPr>
+            <a:r>
+              <a:rPr sz="1500">
+                <a:solidFill>
+                  <a:srgbClr val="22282E"/>
+                </a:solidFill>
+              </a:rPr>
+              <a:t>•  Deshabilitar DTD: configurar el parser para no procesar entidades. Característica: defensa definitiva.</a:t>
             </a:r>
           </a:p>
         </p:txBody>
@@ -4360,7 +4766,7 @@
                   <a:srgbClr val="0B3D2E"/>
                 </a:solidFill>
               </a:rPr>
-              <a:t>🧪 Laboratorio guiado</a:t>
+              <a:t>📔 Glosario</a:t>
             </a:r>
           </a:p>
         </p:txBody>
@@ -4398,97 +4804,97 @@
                   <a:srgbClr val="22282E"/>
                 </a:solidFill>
               </a:rPr>
-              <a:t>•  Encuentra un endpoint que acepte XML (importar datos, SOAP, comprobar stock).</a:t>
-            </a:r>
-          </a:p>
-          <a:p>
-            <a:pPr>
-              <a:spcAft>
-                <a:spcPts val="600"/>
-              </a:spcAft>
-            </a:pPr>
-            <a:r>
-              <a:rPr sz="1500">
-                <a:solidFill>
-                  <a:srgbClr val="22282E"/>
-                </a:solidFill>
-              </a:rPr>
-              <a:t>•  Inyecta una entidad externa para leer un archivo:</a:t>
-            </a:r>
-          </a:p>
-          <a:p>
-            <a:pPr>
-              <a:spcAft>
-                <a:spcPts val="600"/>
-              </a:spcAft>
-            </a:pPr>
-            <a:r>
-              <a:rPr sz="1500">
-                <a:solidFill>
-                  <a:srgbClr val="22282E"/>
-                </a:solidFill>
-              </a:rPr>
-              <a:t>•  &lt;?xml version="1.0"?&gt;</a:t>
-            </a:r>
-          </a:p>
-          <a:p>
-            <a:pPr>
-              <a:spcAft>
-                <a:spcPts val="600"/>
-              </a:spcAft>
-            </a:pPr>
-            <a:r>
-              <a:rPr sz="1500">
-                <a:solidFill>
-                  <a:srgbClr val="22282E"/>
-                </a:solidFill>
-              </a:rPr>
-              <a:t>•  &lt;!DOCTYPE foo [ &lt;!ENTITY xxe SYSTEM "file:///etc/passwd"&gt; ]&gt;</a:t>
-            </a:r>
-          </a:p>
-          <a:p>
-            <a:pPr>
-              <a:spcAft>
-                <a:spcPts val="600"/>
-              </a:spcAft>
-            </a:pPr>
-            <a:r>
-              <a:rPr sz="1500">
-                <a:solidFill>
-                  <a:srgbClr val="22282E"/>
-                </a:solidFill>
-              </a:rPr>
-              <a:t>•  &lt;stockCheck&gt;&lt;productId&gt;&amp;xxe;&lt;/productId&gt;&lt;/stockCheck&gt;</a:t>
-            </a:r>
-          </a:p>
-          <a:p>
-            <a:pPr>
-              <a:spcAft>
-                <a:spcPts val="600"/>
-              </a:spcAft>
-            </a:pPr>
-            <a:r>
-              <a:rPr sz="1500">
-                <a:solidFill>
-                  <a:srgbClr val="22282E"/>
-                </a:solidFill>
-              </a:rPr>
-              <a:t>•  Observa el contenido del archivo reflejado en la respuesta.</a:t>
-            </a:r>
-          </a:p>
-          <a:p>
-            <a:pPr>
-              <a:spcAft>
-                <a:spcPts val="600"/>
-              </a:spcAft>
-            </a:pPr>
-            <a:r>
-              <a:rPr sz="1500">
-                <a:solidFill>
-                  <a:srgbClr val="22282E"/>
-                </a:solidFill>
-              </a:rPr>
-              <a:t>•  Convierte el XXE en SSRF apuntando la entidad a http://169.254.169.254/....</a:t>
+              <a:t>•  Término — Definición concisa</a:t>
+            </a:r>
+          </a:p>
+          <a:p>
+            <a:pPr>
+              <a:spcAft>
+                <a:spcPts val="600"/>
+              </a:spcAft>
+            </a:pPr>
+            <a:r>
+              <a:rPr sz="1500">
+                <a:solidFill>
+                  <a:srgbClr val="22282E"/>
+                </a:solidFill>
+              </a:rPr>
+              <a:t>•  XXE — Abuso de las entidades externas de XML</a:t>
+            </a:r>
+          </a:p>
+          <a:p>
+            <a:pPr>
+              <a:spcAft>
+                <a:spcPts val="600"/>
+              </a:spcAft>
+            </a:pPr>
+            <a:r>
+              <a:rPr sz="1500">
+                <a:solidFill>
+                  <a:srgbClr val="22282E"/>
+                </a:solidFill>
+              </a:rPr>
+              <a:t>•  Entidad XML — Variable definida en la DTD que se expande en el cuerpo</a:t>
+            </a:r>
+          </a:p>
+          <a:p>
+            <a:pPr>
+              <a:spcAft>
+                <a:spcPts val="600"/>
+              </a:spcAft>
+            </a:pPr>
+            <a:r>
+              <a:rPr sz="1500">
+                <a:solidFill>
+                  <a:srgbClr val="22282E"/>
+                </a:solidFill>
+              </a:rPr>
+              <a:t>•  DTD — Definición de tipo de documento; donde se declaran entidades</a:t>
+            </a:r>
+          </a:p>
+          <a:p>
+            <a:pPr>
+              <a:spcAft>
+                <a:spcPts val="600"/>
+              </a:spcAft>
+            </a:pPr>
+            <a:r>
+              <a:rPr sz="1500">
+                <a:solidFill>
+                  <a:srgbClr val="22282E"/>
+                </a:solidFill>
+              </a:rPr>
+              <a:t>•  Entidad externa — Entidad que apunta a un fichero o URL</a:t>
+            </a:r>
+          </a:p>
+          <a:p>
+            <a:pPr>
+              <a:spcAft>
+                <a:spcPts val="600"/>
+              </a:spcAft>
+            </a:pPr>
+            <a:r>
+              <a:rPr sz="1500">
+                <a:solidFill>
+                  <a:srgbClr val="22282E"/>
+                </a:solidFill>
+              </a:rPr>
+              <a:t>•  SYSTEM — Palabra clave que declara un recurso externo</a:t>
+            </a:r>
+          </a:p>
+          <a:p>
+            <a:pPr>
+              <a:spcAft>
+                <a:spcPts val="600"/>
+              </a:spcAft>
+            </a:pPr>
+            <a:r>
+              <a:rPr sz="1500">
+                <a:solidFill>
+                  <a:srgbClr val="22282E"/>
+                </a:solidFill>
+              </a:rPr>
+              <a:t>•  Lectura de ficheros — file:///etc/passwd insertado en la respuesta</a:t>
             </a:r>
           </a:p>
         </p:txBody>
@@ -4539,7 +4945,7 @@
                   <a:srgbClr val="0B3D2E"/>
                 </a:solidFill>
               </a:rPr>
-              <a:t>✍️ Ejercicios</a:t>
+              <a:t>🧰 Herramientas y preparación</a:t>
             </a:r>
           </a:p>
         </p:txBody>
@@ -4577,82 +4983,37 @@
                   <a:srgbClr val="22282E"/>
                 </a:solidFill>
               </a:rPr>
-              <a:t>•  Lee /etc/hostname y /etc/passwd en el lab y explica la diferencia de impacto.</a:t>
-            </a:r>
-          </a:p>
-          <a:p>
-            <a:pPr>
-              <a:spcAft>
-                <a:spcPts val="600"/>
-              </a:spcAft>
-            </a:pPr>
-            <a:r>
-              <a:rPr sz="1500">
-                <a:solidFill>
-                  <a:srgbClr val="22282E"/>
-                </a:solidFill>
-              </a:rPr>
-              <a:t>•  Transforma un XXE de lectura en un SSRF a metadata.</a:t>
-            </a:r>
-          </a:p>
-          <a:p>
-            <a:pPr>
-              <a:spcAft>
-                <a:spcPts val="600"/>
-              </a:spcAft>
-            </a:pPr>
-            <a:r>
-              <a:rPr sz="1500">
-                <a:solidFill>
-                  <a:srgbClr val="22282E"/>
-                </a:solidFill>
-              </a:rPr>
-              <a:t>•  Construye el DTD externo para una XXE ciega OOB.</a:t>
-            </a:r>
-          </a:p>
-          <a:p>
-            <a:pPr>
-              <a:spcAft>
-                <a:spcPts val="600"/>
-              </a:spcAft>
-            </a:pPr>
-            <a:r>
-              <a:rPr sz="1500">
-                <a:solidFill>
-                  <a:srgbClr val="22282E"/>
-                </a:solidFill>
-              </a:rPr>
-              <a:t>•  Investiga cómo un SVG subido puede desencadenar XXE.</a:t>
-            </a:r>
-          </a:p>
-          <a:p>
-            <a:pPr>
-              <a:spcAft>
-                <a:spcPts val="600"/>
-              </a:spcAft>
-            </a:pPr>
-            <a:r>
-              <a:rPr sz="1500">
-                <a:solidFill>
-                  <a:srgbClr val="22282E"/>
-                </a:solidFill>
-              </a:rPr>
-              <a:t>•  Escribe la configuración segura de un parser en Java/Python que deshabilite DTD.</a:t>
-            </a:r>
-          </a:p>
-          <a:p>
-            <a:pPr>
-              <a:spcAft>
-                <a:spcPts val="600"/>
-              </a:spcAft>
-            </a:pPr>
-            <a:r>
-              <a:rPr sz="1500">
-                <a:solidFill>
-                  <a:srgbClr val="22282E"/>
-                </a:solidFill>
-              </a:rPr>
-              <a:t>•  Explica por qué SAML es históricamente vulnerable a XXE.</a:t>
+              <a:t>•  PortSwigger labs de XXE y Juice Shop (reto de XXE).</a:t>
+            </a:r>
+          </a:p>
+          <a:p>
+            <a:pPr>
+              <a:spcAft>
+                <a:spcPts val="600"/>
+              </a:spcAft>
+            </a:pPr>
+            <a:r>
+              <a:rPr sz="1500">
+                <a:solidFill>
+                  <a:srgbClr val="22282E"/>
+                </a:solidFill>
+              </a:rPr>
+              <a:t>•  Burp para editar cuerpos XML.</a:t>
+            </a:r>
+          </a:p>
+          <a:p>
+            <a:pPr>
+              <a:spcAft>
+                <a:spcPts val="600"/>
+              </a:spcAft>
+            </a:pPr>
+            <a:r>
+              <a:rPr sz="1500">
+                <a:solidFill>
+                  <a:srgbClr val="22282E"/>
+                </a:solidFill>
+              </a:rPr>
+              <a:t>•  Servidor propio para alojar el DTD externo en XXE ciega.</a:t>
             </a:r>
           </a:p>
         </p:txBody>
@@ -4703,7 +5064,7 @@
                   <a:srgbClr val="0B3D2E"/>
                 </a:solidFill>
               </a:rPr>
-              <a:t>📝 Reto verificable</a:t>
+              <a:t>🧪 Laboratorio guiado</a:t>
             </a:r>
           </a:p>
         </p:txBody>
@@ -4741,22 +5102,97 @@
                   <a:srgbClr val="22282E"/>
                 </a:solidFill>
               </a:rPr>
-              <a:t>•  Resuelve un lab de XXE ciega de PortSwigger exfiltrando el contenido de un archivo del servidor mediante un DTD externo alojado por ti.</a:t>
-            </a:r>
-          </a:p>
-          <a:p>
-            <a:pPr>
-              <a:spcAft>
-                <a:spcPts val="600"/>
-              </a:spcAft>
-            </a:pPr>
-            <a:r>
-              <a:rPr sz="1500">
-                <a:solidFill>
-                  <a:srgbClr val="22282E"/>
-                </a:solidFill>
-              </a:rPr>
-              <a:t>•  Criterio de aceptación: el lab queda resuelto, entregas el DTD externo, el payload y el dato exfiltrado, y explicas la configuración de parser que lo evitaría.</a:t>
+              <a:t>•  Encuentra un endpoint que acepte XML (importar datos, SOAP, comprobar stock).</a:t>
+            </a:r>
+          </a:p>
+          <a:p>
+            <a:pPr>
+              <a:spcAft>
+                <a:spcPts val="600"/>
+              </a:spcAft>
+            </a:pPr>
+            <a:r>
+              <a:rPr sz="1500">
+                <a:solidFill>
+                  <a:srgbClr val="22282E"/>
+                </a:solidFill>
+              </a:rPr>
+              <a:t>•  Inyecta una entidad externa para leer un archivo:</a:t>
+            </a:r>
+          </a:p>
+          <a:p>
+            <a:pPr>
+              <a:spcAft>
+                <a:spcPts val="600"/>
+              </a:spcAft>
+            </a:pPr>
+            <a:r>
+              <a:rPr sz="1500">
+                <a:solidFill>
+                  <a:srgbClr val="22282E"/>
+                </a:solidFill>
+              </a:rPr>
+              <a:t>•  Observa el contenido del archivo reflejado en la respuesta.</a:t>
+            </a:r>
+          </a:p>
+          <a:p>
+            <a:pPr>
+              <a:spcAft>
+                <a:spcPts val="600"/>
+              </a:spcAft>
+            </a:pPr>
+            <a:r>
+              <a:rPr sz="1500">
+                <a:solidFill>
+                  <a:srgbClr val="22282E"/>
+                </a:solidFill>
+              </a:rPr>
+              <a:t>•  Convierte el XXE en SSRF apuntando la entidad a http://169.254.169.254/....</a:t>
+            </a:r>
+          </a:p>
+          <a:p>
+            <a:pPr>
+              <a:spcAft>
+                <a:spcPts val="600"/>
+              </a:spcAft>
+            </a:pPr>
+            <a:r>
+              <a:rPr sz="1500">
+                <a:solidFill>
+                  <a:srgbClr val="22282E"/>
+                </a:solidFill>
+              </a:rPr>
+              <a:t>•  Para XXE ciega, aloja un DTD externo en tu servidor y usa parameter entities para exfiltrar por HTTP/OOB.</a:t>
+            </a:r>
+          </a:p>
+          <a:p>
+            <a:pPr>
+              <a:spcAft>
+                <a:spcPts val="600"/>
+              </a:spcAft>
+            </a:pPr>
+            <a:r>
+              <a:rPr sz="1500">
+                <a:solidFill>
+                  <a:srgbClr val="22282E"/>
+                </a:solidFill>
+              </a:rPr>
+              <a:t>•  Prueba XXE en un archivo SVG o DOCX subido (son XML por dentro).</a:t>
+            </a:r>
+          </a:p>
+          <a:p>
+            <a:pPr>
+              <a:spcAft>
+                <a:spcPts val="600"/>
+              </a:spcAft>
+            </a:pPr>
+            <a:r>
+              <a:rPr sz="1500">
+                <a:solidFill>
+                  <a:srgbClr val="22282E"/>
+                </a:solidFill>
+              </a:rPr>
+              <a:t>•  Documenta el archivo leído, el vector y el impacto.</a:t>
             </a:r>
           </a:p>
         </p:txBody>
